--- a/Ollama_iGPU_Performance_Tuning.pptx
+++ b/Ollama_iGPU_Performance_Tuning.pptx
@@ -327,11 +327,11 @@
           <c:showBubbleSize val="0"/>
         </c:dLbls>
         <c:gapWidth val="150"/>
-        <c:axId val="137732864"/>
-        <c:axId val="137744384"/>
+        <c:axId val="264505216"/>
+        <c:axId val="264513408"/>
       </c:barChart>
       <c:catAx>
-        <c:axId val="137732864"/>
+        <c:axId val="264505216"/>
         <c:scaling>
           <c:orientation val="minMax"/>
         </c:scaling>
@@ -365,7 +365,7 @@
             <a:endParaRPr lang="de-DE"/>
           </a:p>
         </c:txPr>
-        <c:crossAx val="137744384"/>
+        <c:crossAx val="264513408"/>
         <c:crosses val="autoZero"/>
         <c:auto val="1"/>
         <c:lblAlgn val="ctr"/>
@@ -373,7 +373,7 @@
         <c:noMultiLvlLbl val="1"/>
       </c:catAx>
       <c:valAx>
-        <c:axId val="137744384"/>
+        <c:axId val="264513408"/>
         <c:scaling>
           <c:orientation val="minMax"/>
         </c:scaling>
@@ -383,7 +383,7 @@
         <c:majorTickMark val="out"/>
         <c:minorTickMark val="none"/>
         <c:tickLblPos val="low"/>
-        <c:crossAx val="137732864"/>
+        <c:crossAx val="264505216"/>
         <c:crosses val="autoZero"/>
         <c:crossBetween val="between"/>
       </c:valAx>
@@ -477,7 +477,6 @@
           <c:dLbls>
             <c:dLbl>
               <c:idx val="0"/>
-              <c:layout/>
               <c:tx>
                 <c:rich>
                   <a:bodyPr/>
@@ -500,7 +499,6 @@
             </c:dLbl>
             <c:dLbl>
               <c:idx val="1"/>
-              <c:layout/>
               <c:tx>
                 <c:rich>
                   <a:bodyPr/>
@@ -618,11 +616,11 @@
           <c:showBubbleSize val="0"/>
         </c:dLbls>
         <c:gapWidth val="150"/>
-        <c:axId val="158619520"/>
-        <c:axId val="158623232"/>
+        <c:axId val="274503936"/>
+        <c:axId val="275215488"/>
       </c:barChart>
       <c:catAx>
-        <c:axId val="158619520"/>
+        <c:axId val="274503936"/>
         <c:scaling>
           <c:orientation val="minMax"/>
         </c:scaling>
@@ -656,7 +654,7 @@
             <a:endParaRPr lang="de-DE"/>
           </a:p>
         </c:txPr>
-        <c:crossAx val="158623232"/>
+        <c:crossAx val="275215488"/>
         <c:crosses val="autoZero"/>
         <c:auto val="1"/>
         <c:lblAlgn val="ctr"/>
@@ -664,7 +662,7 @@
         <c:noMultiLvlLbl val="1"/>
       </c:catAx>
       <c:valAx>
-        <c:axId val="158623232"/>
+        <c:axId val="275215488"/>
         <c:scaling>
           <c:orientation val="minMax"/>
         </c:scaling>
@@ -674,7 +672,7 @@
         <c:majorTickMark val="out"/>
         <c:minorTickMark val="none"/>
         <c:tickLblPos val="low"/>
-        <c:crossAx val="158619520"/>
+        <c:crossAx val="274503936"/>
         <c:crosses val="autoZero"/>
         <c:crossBetween val="between"/>
       </c:valAx>
@@ -755,7 +753,6 @@
           </a:p>
         </c:rich>
       </c:tx>
-      <c:layout/>
       <c:overlay val="0"/>
     </c:title>
     <c:autoTitleDeleted val="0"/>
@@ -866,11 +863,11 @@
           <c:showBubbleSize val="0"/>
         </c:dLbls>
         <c:gapWidth val="150"/>
-        <c:axId val="140944896"/>
-        <c:axId val="141021952"/>
+        <c:axId val="276088704"/>
+        <c:axId val="276092032"/>
       </c:barChart>
       <c:catAx>
-        <c:axId val="140944896"/>
+        <c:axId val="276088704"/>
         <c:scaling>
           <c:orientation val="minMax"/>
         </c:scaling>
@@ -904,7 +901,7 @@
             <a:endParaRPr lang="de-DE"/>
           </a:p>
         </c:txPr>
-        <c:crossAx val="141021952"/>
+        <c:crossAx val="276092032"/>
         <c:crosses val="autoZero"/>
         <c:auto val="1"/>
         <c:lblAlgn val="ctr"/>
@@ -912,7 +909,7 @@
         <c:noMultiLvlLbl val="1"/>
       </c:catAx>
       <c:valAx>
-        <c:axId val="141021952"/>
+        <c:axId val="276092032"/>
         <c:scaling>
           <c:orientation val="minMax"/>
         </c:scaling>
@@ -964,7 +961,6 @@
               </a:p>
             </c:rich>
           </c:tx>
-          <c:layout/>
           <c:overlay val="0"/>
         </c:title>
         <c:numFmt formatCode="General" sourceLinked="0"/>
@@ -995,7 +991,7 @@
             <a:endParaRPr lang="de-DE"/>
           </a:p>
         </c:txPr>
-        <c:crossAx val="140944896"/>
+        <c:crossAx val="276088704"/>
         <c:crosses val="autoZero"/>
         <c:crossBetween val="between"/>
       </c:valAx>
@@ -1057,7 +1053,6 @@
           </a:p>
         </c:rich>
       </c:tx>
-      <c:layout/>
       <c:overlay val="0"/>
     </c:title>
     <c:autoTitleDeleted val="0"/>
@@ -1170,11 +1165,11 @@
           <c:showBubbleSize val="0"/>
         </c:dLbls>
         <c:gapWidth val="150"/>
-        <c:axId val="142037760"/>
-        <c:axId val="142053376"/>
+        <c:axId val="277234816"/>
+        <c:axId val="277242240"/>
       </c:barChart>
       <c:catAx>
-        <c:axId val="142037760"/>
+        <c:axId val="277234816"/>
         <c:scaling>
           <c:orientation val="minMax"/>
         </c:scaling>
@@ -1208,7 +1203,7 @@
             <a:endParaRPr lang="de-DE"/>
           </a:p>
         </c:txPr>
-        <c:crossAx val="142053376"/>
+        <c:crossAx val="277242240"/>
         <c:crosses val="autoZero"/>
         <c:auto val="1"/>
         <c:lblAlgn val="ctr"/>
@@ -1216,7 +1211,7 @@
         <c:noMultiLvlLbl val="1"/>
       </c:catAx>
       <c:valAx>
-        <c:axId val="142053376"/>
+        <c:axId val="277242240"/>
         <c:scaling>
           <c:orientation val="minMax"/>
         </c:scaling>
@@ -1226,7 +1221,7 @@
         <c:majorTickMark val="out"/>
         <c:minorTickMark val="none"/>
         <c:tickLblPos val="nextTo"/>
-        <c:crossAx val="142037760"/>
+        <c:crossAx val="277234816"/>
         <c:crosses val="autoZero"/>
         <c:crossBetween val="between"/>
       </c:valAx>
@@ -5927,8 +5922,8 @@
         </p:nvSpPr>
         <p:spPr>
           <a:xfrm>
-            <a:off x="344805" y="5806440"/>
-            <a:ext cx="1045845" cy="365760"/>
+            <a:off x="659130" y="5806440"/>
+            <a:ext cx="4541520" cy="365760"/>
           </a:xfrm>
           <a:prstGeom prst="rect">
             <a:avLst/>
@@ -5953,6 +5948,19 @@
                 <a:cs typeface="Calibri" pitchFamily="34" charset="-120"/>
               </a:rPr>
               <a:t>15.09.2026</a:t>
+            </a:r>
+          </a:p>
+          <a:p>
+            <a:r>
+              <a:rPr lang="en-US" sz="1300" i="1">
+                <a:solidFill>
+                  <a:srgbClr val="9AA3C0"/>
+                </a:solidFill>
+                <a:latin typeface="Calibri" pitchFamily="34" charset="0"/>
+                <a:ea typeface="Calibri" pitchFamily="34" charset="-122"/>
+                <a:cs typeface="Calibri" pitchFamily="34" charset="-120"/>
+              </a:rPr>
+              <a:t>Dateien https://github.com/Ralfhgw/igpu-performance-tuning.git</a:t>
             </a:r>
             <a:endParaRPr lang="en-US" sz="1300" dirty="0"/>
           </a:p>
@@ -23768,29 +23776,7 @@
                 <a:ea typeface="Calibri" pitchFamily="34" charset="-122"/>
                 <a:cs typeface="Calibri" pitchFamily="34" charset="-120"/>
               </a:rPr>
-              <a:t>antwortet </a:t>
-            </a:r>
-            <a:r>
-              <a:rPr lang="en-US" sz="1300">
-                <a:solidFill>
-                  <a:srgbClr val="5B6478"/>
-                </a:solidFill>
-                <a:latin typeface="Calibri" pitchFamily="34" charset="0"/>
-                <a:ea typeface="Calibri" pitchFamily="34" charset="-122"/>
-                <a:cs typeface="Calibri" pitchFamily="34" charset="-120"/>
-              </a:rPr>
-              <a:t>– optimiert </a:t>
-            </a:r>
-            <a:r>
-              <a:rPr lang="en-US" sz="1300">
-                <a:solidFill>
-                  <a:srgbClr val="5B6478"/>
-                </a:solidFill>
-                <a:latin typeface="Calibri" pitchFamily="34" charset="0"/>
-                <a:ea typeface="Calibri" pitchFamily="34" charset="-122"/>
-                <a:cs typeface="Calibri" pitchFamily="34" charset="-120"/>
-              </a:rPr>
-              <a:t>für </a:t>
+              <a:t>antwortet – optimiert für </a:t>
             </a:r>
             <a:r>
               <a:rPr lang="en-US" sz="1300" smtClean="0">
@@ -25895,18 +25881,7 @@
                 <a:ea typeface="Calibri" pitchFamily="34" charset="-122"/>
                 <a:cs typeface="Calibri" pitchFamily="34" charset="-120"/>
               </a:rPr>
-              <a:t>Diese Parameter bestimmen den Arbeitsspeicher-Hebel und die Hardware-Zuteilung zwischen CPU und </a:t>
-            </a:r>
-            <a:r>
-              <a:rPr lang="en-US" sz="1400">
-                <a:solidFill>
-                  <a:srgbClr val="5B6478"/>
-                </a:solidFill>
-                <a:latin typeface="Calibri" pitchFamily="34" charset="0"/>
-                <a:ea typeface="Calibri" pitchFamily="34" charset="-122"/>
-                <a:cs typeface="Calibri" pitchFamily="34" charset="-120"/>
-              </a:rPr>
-              <a:t>iGPU</a:t>
+              <a:t>Diese Parameter bestimmen den Arbeitsspeicher-Hebel und die Hardware-Zuteilung zwischen CPU und iGPU</a:t>
             </a:r>
             <a:r>
               <a:rPr lang="en-US" sz="1400" smtClean="0">
@@ -31628,18 +31603,7 @@
                 <a:ea typeface="Arial" pitchFamily="34" charset="-122"/>
                 <a:cs typeface="Arial" pitchFamily="34" charset="-120"/>
               </a:rPr>
-              <a:t>der</a:t>
-            </a:r>
-            <a:r>
-              <a:rPr lang="en-US" sz="3000" b="1" smtClean="0">
-                <a:solidFill>
-                  <a:srgbClr val="FFFFFF"/>
-                </a:solidFill>
-                <a:latin typeface="Arial" pitchFamily="34" charset="0"/>
-                <a:ea typeface="Arial" pitchFamily="34" charset="-122"/>
-                <a:cs typeface="Arial" pitchFamily="34" charset="-120"/>
-              </a:rPr>
-              <a:t> </a:t>
+              <a:t>der </a:t>
             </a:r>
             <a:r>
               <a:rPr lang="en-US" sz="3000" b="1" dirty="0">
@@ -37948,11 +37912,7 @@
             </a:r>
             <a:r>
               <a:rPr lang="de-DE" sz="1100" b="1"/>
-              <a:t>Teststeuerung (Edit </a:t>
-            </a:r>
-            <a:r>
-              <a:rPr lang="de-DE" sz="1100" b="1"/>
-              <a:t>Fields</a:t>
+              <a:t>Teststeuerung (Edit Fields</a:t>
             </a:r>
             <a:r>
               <a:rPr lang="de-DE" sz="1100" b="1" smtClean="0"/>
@@ -37964,11 +37924,7 @@
             </a:r>
             <a:r>
               <a:rPr lang="de-DE" sz="1100"/>
-              <a:t>Workflow startet links oben. Über zentrale Schalter (boolesche Variablen) im Node Edit Fields wird vor dem Start exakt definiert, welche Pfade und Qualitäts-Checks aktiv sind. Das erlaubt modulare Tests ohne </a:t>
-            </a:r>
-            <a:r>
-              <a:rPr lang="de-DE" sz="1100"/>
-              <a:t>Code-Änderung</a:t>
+              <a:t>Workflow startet links oben. Über zentrale Schalter (boolesche Variablen) im Node Edit Fields wird vor dem Start exakt definiert, welche Pfade und Qualitäts-Checks aktiv sind. Das erlaubt modulare Tests ohne Code-Änderung</a:t>
             </a:r>
             <a:r>
               <a:rPr lang="de-DE" sz="1100" smtClean="0"/>
@@ -37985,11 +37941,7 @@
             </a:r>
             <a:r>
               <a:rPr lang="de-DE" sz="1100" b="1"/>
-              <a:t>&amp; Vektor-Vorbereitung (Unterer </a:t>
-            </a:r>
-            <a:r>
-              <a:rPr lang="de-DE" sz="1100" b="1"/>
-              <a:t>Pfad</a:t>
+              <a:t>&amp; Vektor-Vorbereitung (Unterer Pfad</a:t>
             </a:r>
             <a:r>
               <a:rPr lang="de-DE" sz="1100" b="1" smtClean="0"/>
@@ -38001,11 +37953,7 @@
             </a:r>
             <a:r>
               <a:rPr lang="de-DE" sz="1100"/>
-              <a:t>saubere, vergleichbare Benchmarks zu garantieren, wird bei Bedarf die Test-Datenbank zurückgesetzt (Benchmark Memorys leeren) und über den Vektor-Speicher (Qdrant-Bulk-Payload) </a:t>
-            </a:r>
-            <a:r>
-              <a:rPr lang="de-DE" sz="1100"/>
-              <a:t>frisch </a:t>
+              <a:t>saubere, vergleichbare Benchmarks zu garantieren, wird bei Bedarf die Test-Datenbank zurückgesetzt (Benchmark Memorys leeren) und über den Vektor-Speicher (Qdrant-Bulk-Payload) frisch </a:t>
             </a:r>
             <a:r>
               <a:rPr lang="de-DE" sz="1100" smtClean="0"/>
@@ -38022,11 +37970,7 @@
             </a:r>
             <a:r>
               <a:rPr lang="de-DE" sz="1100" b="1"/>
-              <a:t>&amp; Prompt-Pipeline (Mittlerer </a:t>
-            </a:r>
-            <a:r>
-              <a:rPr lang="de-DE" sz="1100" b="1"/>
-              <a:t>Pfad</a:t>
+              <a:t>&amp; Prompt-Pipeline (Mittlerer Pfad</a:t>
             </a:r>
             <a:r>
               <a:rPr lang="de-DE" sz="1100" b="1" smtClean="0"/>
@@ -38038,11 +37982,7 @@
             </a:r>
             <a:r>
               <a:rPr lang="de-DE" sz="1100"/>
-              <a:t>Testfragen werden eingelesen (Flitest Datei lesen), mit Kontext angereichert und über die Ollama-Embeddings in Qdrant gesucht. Aus diesen Vektor-Ergebnissen wird automatisiert der finale </a:t>
-            </a:r>
-            <a:r>
-              <a:rPr lang="de-DE" sz="1100"/>
-              <a:t>Benchmark-Prompt </a:t>
+              <a:t>Testfragen werden eingelesen (Flitest Datei lesen), mit Kontext angereichert und über die Ollama-Embeddings in Qdrant gesucht. Aus diesen Vektor-Ergebnissen wird automatisiert der finale Benchmark-Prompt </a:t>
             </a:r>
             <a:r>
               <a:rPr lang="de-DE" sz="1100" smtClean="0"/>
@@ -38060,11 +38000,7 @@
             </a:r>
             <a:r>
               <a:rPr lang="de-DE" sz="1100" b="1"/>
-              <a:t>&amp; Analyse (Rechter </a:t>
-            </a:r>
-            <a:r>
-              <a:rPr lang="de-DE" sz="1100" b="1"/>
-              <a:t>Pfad</a:t>
+              <a:t>&amp; Analyse (Rechter Pfad</a:t>
             </a:r>
             <a:r>
               <a:rPr lang="de-DE" sz="1100" b="1" smtClean="0"/>
@@ -45777,7 +45713,7 @@
   <a:extraClrSchemeLst/>
   <a:extLst>
     <a:ext uri="{05A4C25C-085E-4340-85A3-A5531E510DB2}">
-      <thm15:themeFamily xmlns:thm15="http://schemas.microsoft.com/office/thememl/2012/main" xmlns="" name="Office Theme" id="{62F939B6-93AF-4DB8-9C6B-D6C7DFDC589F}" vid="{4A3C46E8-61CC-4603-A589-7422A47A8E4A}"/>
+      <thm15:themeFamily xmlns="" xmlns:thm15="http://schemas.microsoft.com/office/thememl/2012/main" name="Office Theme" id="{62F939B6-93AF-4DB8-9C6B-D6C7DFDC589F}" vid="{4A3C46E8-61CC-4603-A589-7422A47A8E4A}"/>
     </a:ext>
   </a:extLst>
 </a:theme>
@@ -46072,7 +46008,7 @@
   <a:extraClrSchemeLst/>
   <a:extLst>
     <a:ext uri="{05A4C25C-085E-4340-85A3-A5531E510DB2}">
-      <thm15:themeFamily xmlns:thm15="http://schemas.microsoft.com/office/thememl/2012/main" xmlns="" name="Office Theme" id="{62F939B6-93AF-4DB8-9C6B-D6C7DFDC589F}" vid="{4A3C46E8-61CC-4603-A589-7422A47A8E4A}"/>
+      <thm15:themeFamily xmlns="" xmlns:thm15="http://schemas.microsoft.com/office/thememl/2012/main" name="Office Theme" id="{62F939B6-93AF-4DB8-9C6B-D6C7DFDC589F}" vid="{4A3C46E8-61CC-4603-A589-7422A47A8E4A}"/>
     </a:ext>
   </a:extLst>
 </a:theme>
@@ -46367,7 +46303,7 @@
   <a:extraClrSchemeLst/>
   <a:extLst>
     <a:ext uri="{05A4C25C-085E-4340-85A3-A5531E510DB2}">
-      <thm15:themeFamily xmlns:thm15="http://schemas.microsoft.com/office/thememl/2012/main" xmlns="" name="Office Theme" id="{62F939B6-93AF-4DB8-9C6B-D6C7DFDC589F}" vid="{4A3C46E8-61CC-4603-A589-7422A47A8E4A}"/>
+      <thm15:themeFamily xmlns="" xmlns:thm15="http://schemas.microsoft.com/office/thememl/2012/main" name="Office Theme" id="{62F939B6-93AF-4DB8-9C6B-D6C7DFDC589F}" vid="{4A3C46E8-61CC-4603-A589-7422A47A8E4A}"/>
     </a:ext>
   </a:extLst>
 </a:theme>
@@ -46662,7 +46598,7 @@
   <a:extraClrSchemeLst/>
   <a:extLst>
     <a:ext uri="{05A4C25C-085E-4340-85A3-A5531E510DB2}">
-      <thm15:themeFamily xmlns:thm15="http://schemas.microsoft.com/office/thememl/2012/main" xmlns="" name="Office Theme" id="{62F939B6-93AF-4DB8-9C6B-D6C7DFDC589F}" vid="{4A3C46E8-61CC-4603-A589-7422A47A8E4A}"/>
+      <thm15:themeFamily xmlns="" xmlns:thm15="http://schemas.microsoft.com/office/thememl/2012/main" name="Office Theme" id="{62F939B6-93AF-4DB8-9C6B-D6C7DFDC589F}" vid="{4A3C46E8-61CC-4603-A589-7422A47A8E4A}"/>
     </a:ext>
   </a:extLst>
 </a:theme>
@@ -46957,7 +46893,7 @@
   <a:extraClrSchemeLst/>
   <a:extLst>
     <a:ext uri="{05A4C25C-085E-4340-85A3-A5531E510DB2}">
-      <thm15:themeFamily xmlns:thm15="http://schemas.microsoft.com/office/thememl/2012/main" xmlns="" name="Office Theme" id="{62F939B6-93AF-4DB8-9C6B-D6C7DFDC589F}" vid="{4A3C46E8-61CC-4603-A589-7422A47A8E4A}"/>
+      <thm15:themeFamily xmlns="" xmlns:thm15="http://schemas.microsoft.com/office/thememl/2012/main" name="Office Theme" id="{62F939B6-93AF-4DB8-9C6B-D6C7DFDC589F}" vid="{4A3C46E8-61CC-4603-A589-7422A47A8E4A}"/>
     </a:ext>
   </a:extLst>
 </a:theme>
